--- a/artifacts/speaking-portfolio-expanded/decks/benchmarks-40min-screen.pptx
+++ b/artifacts/speaking-portfolio-expanded/decks/benchmarks-40min-screen.pptx
@@ -107,7 +107,7 @@
                 <a:ea typeface="Arial"/>
                 <a:cs typeface="Arial"/>
               </a:rPr>
-              <a:t xml:space="preserve">A leaderboard, and the question it isn't answering</a:t>
+              <a:t xml:space="preserve">Tuxedo of Benchmarks</a:t>
             </a:r>
             <a:endParaRPr lang="en-US" sz="1200"/>
           </a:p>
@@ -954,7 +954,7 @@
                 <a:ea typeface="Arial"/>
                 <a:cs typeface="Arial"/>
               </a:rPr>
-              <a:t xml:space="preserve">Contamination and the reusable holdout</a:t>
+              <a:t xml:space="preserve">holdout.json Is Not Held Out</a:t>
             </a:r>
             <a:endParaRPr lang="en-US" sz="1200"/>
           </a:p>
@@ -1732,7 +1732,7 @@
                 <a:ea typeface="Arial"/>
                 <a:cs typeface="Arial"/>
               </a:rPr>
-              <a:t xml:space="preserve">Use the cheapest check that can honestly fail</a:t>
+              <a:t xml:space="preserve">The Cheapest Honest No</a:t>
             </a:r>
             <a:endParaRPr lang="en-US" sz="1200"/>
           </a:p>
@@ -2098,7 +2098,7 @@
                 <a:ea typeface="Arial"/>
                 <a:cs typeface="Arial"/>
               </a:rPr>
-              <a:t xml:space="preserve">Make it a release gate</a:t>
+              <a:t xml:space="preserve">Write the Rejection Rule First</a:t>
             </a:r>
             <a:endParaRPr lang="en-US" sz="1200"/>
           </a:p>
@@ -2763,7 +2763,53 @@
                 <a:ea typeface="Arial"/>
                 <a:cs typeface="Arial"/>
               </a:rPr>
-              <a:t xml:space="preserve">The suite is an instrument. Test the instrument. Then use it to make a decision.</a:t>
+              <a:t xml:space="preserve">The suite is an instrument. Test the instrument.</a:t>
+            </a:r>
+            <a:endParaRPr lang="en-US" sz="1200"/>
+          </a:p>
+          <a:p>
+            <a:pPr marL="0" indent="0">
+              <a:lnSpc>
+                <a:spcPts val="1560"/>
+              </a:lnSpc>
+              <a:spcAft>
+                <a:spcPts val="0"/>
+              </a:spcAft>
+              <a:buNone/>
+            </a:pPr>
+            <a:r>
+              <a:rPr lang="en-US" sz="1200" b="0">
+                <a:solidFill>
+                  <a:srgbClr val="202b33"/>
+                </a:solidFill>
+                <a:latin typeface="Arial"/>
+                <a:ea typeface="Arial"/>
+                <a:cs typeface="Arial"/>
+              </a:rPr>
+              <a:t xml:space="preserve"/>
+            </a:r>
+            <a:endParaRPr lang="en-US" sz="1200"/>
+          </a:p>
+          <a:p>
+            <a:pPr marL="0" indent="0">
+              <a:lnSpc>
+                <a:spcPts val="1560"/>
+              </a:lnSpc>
+              <a:spcAft>
+                <a:spcPts val="0"/>
+              </a:spcAft>
+              <a:buNone/>
+            </a:pPr>
+            <a:r>
+              <a:rPr lang="en-US" sz="1200" b="0">
+                <a:solidFill>
+                  <a:srgbClr val="202b33"/>
+                </a:solidFill>
+                <a:latin typeface="Arial"/>
+                <a:ea typeface="Arial"/>
+                <a:cs typeface="Arial"/>
+              </a:rPr>
+              <a:t xml:space="preserve">Stage direction: Stop talking.</a:t>
             </a:r>
             <a:endParaRPr lang="en-US" sz="1200"/>
           </a:p>
@@ -3129,7 +3175,7 @@
                 <a:ea typeface="Arial"/>
                 <a:cs typeface="Arial"/>
               </a:rPr>
-              <a:t xml:space="preserve">Prices can help choose among acceptable systems. They cannot tell us which systems are acceptable. The cost-per-success arithmetic belongs to Cry Me a Free Tier. Today the question is whether this score means anything.</a:t>
+              <a:t xml:space="preserve">Prices can help choose among acceptable systems. They cannot tell us which systems are acceptable. The cost-per-success arithmetic belongs to Buy Me a Free Tier. Today the question is whether this score means anything.</a:t>
             </a:r>
             <a:endParaRPr lang="en-US" sz="1200"/>
           </a:p>
@@ -3541,7 +3587,7 @@
                 <a:ea typeface="Arial"/>
                 <a:cs typeface="Arial"/>
               </a:rPr>
-              <a:t xml:space="preserve">Source: Campbell (1979), [Assessing the impact of planned social change](https://doi.org/10.1016/0149-7189%2879%2990048-X). Strathern (1997), [Improving ratings](https://gwern.net/doc/statistics/decision/1997-strathern.pdf), European Review 5(3), 305–321. Formulations above are paraphrases.</a:t>
+              <a:t xml:space="preserve">Source: Goodhart (1975), Problems of Monetary Management: The U.K. Experience, Reserve Bank of Australia conference paper (reprinted 1981). Campbell (1979), [Assessing the impact of planned social change](https://doi.org/10.1016/0149-7189%2879%2990048-X). Strathern (1997), [Improving ratings](https://gwern.net/doc/statistics/decision/1997-strathern.pdf), European Review 5(3), 305–321. Formulations above are attributed paraphrases, not claims that every optimized benchmark has stopped measuring anything.</a:t>
             </a:r>
             <a:endParaRPr lang="en-US" sz="1200"/>
           </a:p>
@@ -3654,7 +3700,7 @@
                 <a:ea typeface="Arial"/>
                 <a:cs typeface="Arial"/>
               </a:rPr>
-              <a:t xml:space="preserve">Your eval suite is a measuring instrument</a:t>
+              <a:t xml:space="preserve">Your Eval Suite Needs Therapy</a:t>
             </a:r>
             <a:endParaRPr lang="en-US" sz="1200"/>
           </a:p>
@@ -4890,7 +4936,7 @@
                 <a:ea typeface="Arial"/>
                 <a:cs typeface="Arial"/>
               </a:rPr>
-              <a:t xml:space="preserve">Run it five times</a:t>
+              <a:t xml:space="preserve">Run the Judges</a:t>
             </a:r>
             <a:endParaRPr lang="en-US" sz="1200"/>
           </a:p>
@@ -5258,7 +5304,7 @@
                 <a:ea typeface="Arial"/>
                 <a:cs typeface="Arial"/>
               </a:rPr>
-              <a:t xml:space="preserve">Source: Dan Levy, [Auto-Tune Your LLM Judge](https://danlevy.net/auto-tune-your-llm-judge/), supplied article. The sequence is reused as a teaching fixture, not a fresh measurement.</a:t>
+              <a:t xml:space="preserve">Source: Dan Levy, [Auto-Tune Your LLM Judge](https://danlevy.net/auto-tune-your-llm-judge/), danlevy.net, 11 August 2026. The sequence is reused as a teaching fixture, not a fresh measurement.</a:t>
             </a:r>
             <a:endParaRPr lang="en-US" sz="1200"/>
           </a:p>
@@ -5371,7 +5417,7 @@
                 <a:ea typeface="Arial"/>
                 <a:cs typeface="Arial"/>
               </a:rPr>
-              <a:t xml:space="preserve">Twenty green cases. About one in seven.</a:t>
+              <a:t xml:space="preserve">Twenty for Twenty, One in Seven</a:t>
             </a:r>
             <a:endParaRPr lang="en-US" sz="1200"/>
           </a:p>
@@ -5463,7 +5509,7 @@
                 <a:ea typeface="Arial"/>
                 <a:cs typeface="Arial"/>
               </a:rPr>
-              <a:t xml:space="preserve">![Twenty green cases. About one in seven.](../../reveal-talks/assets/benchmarks/bound.svg)</a:t>
+              <a:t xml:space="preserve">![Twenty for Twenty, One in Seven](../../reveal-talks/assets/benchmarks/bound.svg)</a:t>
             </a:r>
             <a:endParaRPr lang="en-US" sz="1200"/>
           </a:p>
@@ -5921,7 +5967,7 @@
                 <a:ea typeface="Arial"/>
                 <a:cs typeface="Arial"/>
               </a:rPr>
-              <a:t xml:space="preserve">Your grader is an instrument too</a:t>
+              <a:t xml:space="preserve">Agreeable to a Fault (κ = 0)</a:t>
             </a:r>
             <a:endParaRPr lang="en-US" sz="1200"/>
           </a:p>
@@ -6266,7 +6312,7 @@
                 <a:ea typeface="Arial"/>
                 <a:cs typeface="Arial"/>
               </a:rPr>
-              <a:t xml:space="preserve">Source: Cohen (1960), [A Coefficient of Agreement for Nominal Scales](https://journals.sagepub.com/doi/abs/10.1177/001316446002000104). Feinstein and Cicchetti (1990), [High agreement but low kappa](https://pubmed.ncbi.nlm.nih.gov/2348207/). [Position bias study](https://arxiv.org/abs/2406.07791); [Self-Preference Bias in LLM-as-a-Judge](https://arxiv.org/abs/2410.21819).</a:t>
+              <a:t xml:space="preserve">Source: Cohen (1960), [A Coefficient of Agreement for Nominal Scales](https://journals.sagepub.com/doi/abs/10.1177/001316446002000104). Feinstein and Cicchetti (1990), [High agreement but low kappa](https://pubmed.ncbi.nlm.nih.gov/2348207/). Shi et al. (2024), [Judging the Judges: position bias in pairwise LLM comparisons](https://arxiv.org/abs/2406.07791). Wataoka et al. (2024), [Self-Preference Bias in LLM-as-a-Judge](https://arxiv.org/abs/2410.21819).</a:t>
             </a:r>
             <a:endParaRPr lang="en-US" sz="1200"/>
           </a:p>
@@ -6499,30 +6545,7 @@
                 <a:ea typeface="Arial"/>
                 <a:cs typeface="Arial"/>
               </a:rPr>
-              <a:t xml:space="preserve">A leaderboard, and the question it isn't</a:t>
-            </a:r>
-            <a:endParaRPr lang="en-US" sz="3900"/>
-          </a:p>
-          <a:p>
-            <a:pPr marL="0" indent="0">
-              <a:lnSpc>
-                <a:spcPts val="4680"/>
-              </a:lnSpc>
-              <a:spcAft>
-                <a:spcPts val="0"/>
-              </a:spcAft>
-              <a:buNone/>
-            </a:pPr>
-            <a:r>
-              <a:rPr lang="en-US" sz="3900" b="1">
-                <a:solidFill>
-                  <a:srgbClr val="F5F1E9"/>
-                </a:solidFill>
-                <a:latin typeface="Arial"/>
-                <a:ea typeface="Arial"/>
-                <a:cs typeface="Arial"/>
-              </a:rPr>
-              <a:t xml:space="preserve">answering</a:t>
+              <a:t xml:space="preserve">Tuxedo of Benchmarks</a:t>
             </a:r>
             <a:endParaRPr lang="en-US" sz="3900"/>
           </a:p>
@@ -7493,7 +7516,7 @@
                 <a:ea typeface="Arial"/>
                 <a:cs typeface="Arial"/>
               </a:rPr>
-              <a:t xml:space="preserve">Contamination and the reusable holdout</a:t>
+              <a:t xml:space="preserve">holdout.json Is Not Held Out</a:t>
             </a:r>
             <a:endParaRPr lang="en-US" sz="3900"/>
           </a:p>
@@ -8343,7 +8366,7 @@
                 <a:ea typeface="Arial"/>
                 <a:cs typeface="Arial"/>
               </a:rPr>
-              <a:t xml:space="preserve">Use the cheapest check that can honestly fail</a:t>
+              <a:t xml:space="preserve">The Cheapest Honest No</a:t>
             </a:r>
             <a:endParaRPr lang="en-US" sz="3900"/>
           </a:p>
@@ -8768,7 +8791,7 @@
                 <a:ea typeface="Arial"/>
                 <a:cs typeface="Arial"/>
               </a:rPr>
-              <a:t xml:space="preserve">Make it a release gate</a:t>
+              <a:t xml:space="preserve">Write the Rejection Rule First</a:t>
             </a:r>
             <a:endParaRPr lang="en-US" sz="3900"/>
           </a:p>
@@ -10589,7 +10612,7 @@
                 <a:ea typeface="Arial"/>
                 <a:cs typeface="Arial"/>
               </a:rPr>
-              <a:t xml:space="preserve">Your eval suite is a measuring instrument</a:t>
+              <a:t xml:space="preserve">Your Eval Suite Needs Therapy</a:t>
             </a:r>
             <a:endParaRPr lang="en-US" sz="3900"/>
           </a:p>
@@ -11864,7 +11887,7 @@
                 <a:ea typeface="Arial"/>
                 <a:cs typeface="Arial"/>
               </a:rPr>
-              <a:t xml:space="preserve">Run it five times</a:t>
+              <a:t xml:space="preserve">Run the Judges</a:t>
             </a:r>
             <a:endParaRPr lang="en-US" sz="3900"/>
           </a:p>
@@ -12387,7 +12410,7 @@
                 <a:ea typeface="Arial"/>
                 <a:cs typeface="Arial"/>
               </a:rPr>
-              <a:t xml:space="preserve">Twenty green cases. About one in seven.</a:t>
+              <a:t xml:space="preserve">Twenty for Twenty, One in Seven</a:t>
             </a:r>
             <a:endParaRPr lang="en-US" sz="3900"/>
           </a:p>
@@ -12417,7 +12440,7 @@
       </p:sp>
       <p:pic>
         <p:nvPicPr>
-          <p:cNvPr id="5" name="5d9d88671737e342604a8bb2f8a50f9753e84270f97998346745671bda4153b9" descr="Twenty green cases. About one in seven."/>
+          <p:cNvPr id="5" name="5d9d88671737e342604a8bb2f8a50f9753e84270f97998346745671bda4153b9" descr="Twenty for Twenty, One in Seven"/>
           <p:cNvPicPr>
             <a:picLocks noChangeAspect="1"/>
           </p:cNvPicPr>
@@ -12671,7 +12694,7 @@
                 <a:ea typeface="Arial"/>
                 <a:cs typeface="Arial"/>
               </a:rPr>
-              <a:t xml:space="preserve">Your grader is an instrument too</a:t>
+              <a:t xml:space="preserve">Agreeable to a Fault (κ = 0)</a:t>
             </a:r>
             <a:endParaRPr lang="en-US" sz="3900"/>
           </a:p>
